--- a/media/ДП Котельников В.В. Презентация.pptx
+++ b/media/ДП Котельников В.В. Презентация.pptx
@@ -21,8 +21,9 @@
     <p:sldId id="277" r:id="rId15"/>
     <p:sldId id="275" r:id="rId16"/>
     <p:sldId id="279" r:id="rId17"/>
-    <p:sldId id="266" r:id="rId18"/>
-    <p:sldId id="273" r:id="rId19"/>
+    <p:sldId id="280" r:id="rId18"/>
+    <p:sldId id="266" r:id="rId19"/>
+    <p:sldId id="273" r:id="rId20"/>
   </p:sldIdLst>
   <p:sldSz cx="12192000" cy="6858000"/>
   <p:notesSz cx="6858000" cy="9144000"/>
@@ -276,7 +277,7 @@
           <a:p>
             <a:fld id="{C24781F2-646F-438A-839B-1922E67681C9}" type="datetimeFigureOut">
               <a:rPr lang="ru-RU" smtClean="0"/>
-              <a:t>09.05.2026</a:t>
+              <a:t>15.05.2026</a:t>
             </a:fld>
             <a:endParaRPr lang="ru-RU"/>
           </a:p>
@@ -474,7 +475,7 @@
           <a:p>
             <a:fld id="{C24781F2-646F-438A-839B-1922E67681C9}" type="datetimeFigureOut">
               <a:rPr lang="ru-RU" smtClean="0"/>
-              <a:t>09.05.2026</a:t>
+              <a:t>15.05.2026</a:t>
             </a:fld>
             <a:endParaRPr lang="ru-RU"/>
           </a:p>
@@ -682,7 +683,7 @@
           <a:p>
             <a:fld id="{C24781F2-646F-438A-839B-1922E67681C9}" type="datetimeFigureOut">
               <a:rPr lang="ru-RU" smtClean="0"/>
-              <a:t>09.05.2026</a:t>
+              <a:t>15.05.2026</a:t>
             </a:fld>
             <a:endParaRPr lang="ru-RU"/>
           </a:p>
@@ -880,7 +881,7 @@
           <a:p>
             <a:fld id="{C24781F2-646F-438A-839B-1922E67681C9}" type="datetimeFigureOut">
               <a:rPr lang="ru-RU" smtClean="0"/>
-              <a:t>09.05.2026</a:t>
+              <a:t>15.05.2026</a:t>
             </a:fld>
             <a:endParaRPr lang="ru-RU"/>
           </a:p>
@@ -1155,7 +1156,7 @@
           <a:p>
             <a:fld id="{C24781F2-646F-438A-839B-1922E67681C9}" type="datetimeFigureOut">
               <a:rPr lang="ru-RU" smtClean="0"/>
-              <a:t>09.05.2026</a:t>
+              <a:t>15.05.2026</a:t>
             </a:fld>
             <a:endParaRPr lang="ru-RU"/>
           </a:p>
@@ -1420,7 +1421,7 @@
           <a:p>
             <a:fld id="{C24781F2-646F-438A-839B-1922E67681C9}" type="datetimeFigureOut">
               <a:rPr lang="ru-RU" smtClean="0"/>
-              <a:t>09.05.2026</a:t>
+              <a:t>15.05.2026</a:t>
             </a:fld>
             <a:endParaRPr lang="ru-RU"/>
           </a:p>
@@ -1832,7 +1833,7 @@
           <a:p>
             <a:fld id="{C24781F2-646F-438A-839B-1922E67681C9}" type="datetimeFigureOut">
               <a:rPr lang="ru-RU" smtClean="0"/>
-              <a:t>09.05.2026</a:t>
+              <a:t>15.05.2026</a:t>
             </a:fld>
             <a:endParaRPr lang="ru-RU"/>
           </a:p>
@@ -1973,7 +1974,7 @@
           <a:p>
             <a:fld id="{C24781F2-646F-438A-839B-1922E67681C9}" type="datetimeFigureOut">
               <a:rPr lang="ru-RU" smtClean="0"/>
-              <a:t>09.05.2026</a:t>
+              <a:t>15.05.2026</a:t>
             </a:fld>
             <a:endParaRPr lang="ru-RU"/>
           </a:p>
@@ -2086,7 +2087,7 @@
           <a:p>
             <a:fld id="{C24781F2-646F-438A-839B-1922E67681C9}" type="datetimeFigureOut">
               <a:rPr lang="ru-RU" smtClean="0"/>
-              <a:t>09.05.2026</a:t>
+              <a:t>15.05.2026</a:t>
             </a:fld>
             <a:endParaRPr lang="ru-RU"/>
           </a:p>
@@ -2397,7 +2398,7 @@
           <a:p>
             <a:fld id="{C24781F2-646F-438A-839B-1922E67681C9}" type="datetimeFigureOut">
               <a:rPr lang="ru-RU" smtClean="0"/>
-              <a:t>09.05.2026</a:t>
+              <a:t>15.05.2026</a:t>
             </a:fld>
             <a:endParaRPr lang="ru-RU"/>
           </a:p>
@@ -2685,7 +2686,7 @@
           <a:p>
             <a:fld id="{C24781F2-646F-438A-839B-1922E67681C9}" type="datetimeFigureOut">
               <a:rPr lang="ru-RU" smtClean="0"/>
-              <a:t>09.05.2026</a:t>
+              <a:t>15.05.2026</a:t>
             </a:fld>
             <a:endParaRPr lang="ru-RU"/>
           </a:p>
@@ -2926,7 +2927,7 @@
           <a:p>
             <a:fld id="{C24781F2-646F-438A-839B-1922E67681C9}" type="datetimeFigureOut">
               <a:rPr lang="ru-RU" smtClean="0"/>
-              <a:t>09.05.2026</a:t>
+              <a:t>15.05.2026</a:t>
             </a:fld>
             <a:endParaRPr lang="ru-RU"/>
           </a:p>
@@ -5949,6 +5950,283 @@
   <p:cSld>
     <p:spTree>
       <p:nvGrpSpPr>
+        <p:cNvPr id="1" name="">
+          <a:extLst>
+            <a:ext uri="{FF2B5EF4-FFF2-40B4-BE49-F238E27FC236}">
+              <a16:creationId xmlns:a16="http://schemas.microsoft.com/office/drawing/2014/main" id="{234F8928-0EDC-7E17-0805-44F28F592BD5}"/>
+            </a:ext>
+          </a:extLst>
+        </p:cNvPr>
+        <p:cNvGrpSpPr/>
+        <p:nvPr/>
+      </p:nvGrpSpPr>
+      <p:grpSpPr>
+        <a:xfrm>
+          <a:off x="0" y="0"/>
+          <a:ext cx="0" cy="0"/>
+          <a:chOff x="0" y="0"/>
+          <a:chExt cx="0" cy="0"/>
+        </a:xfrm>
+      </p:grpSpPr>
+      <p:sp>
+        <p:nvSpPr>
+          <p:cNvPr id="2" name="Заголовок 1">
+            <a:extLst>
+              <a:ext uri="{FF2B5EF4-FFF2-40B4-BE49-F238E27FC236}">
+                <a16:creationId xmlns:a16="http://schemas.microsoft.com/office/drawing/2014/main" id="{0893E846-568C-0383-95B8-EEE92B95CA1D}"/>
+              </a:ext>
+            </a:extLst>
+          </p:cNvPr>
+          <p:cNvSpPr txBox="1">
+            <a:spLocks/>
+          </p:cNvSpPr>
+          <p:nvPr/>
+        </p:nvSpPr>
+        <p:spPr>
+          <a:xfrm>
+            <a:off x="838200" y="365126"/>
+            <a:ext cx="10515600" cy="673100"/>
+          </a:xfrm>
+          <a:prstGeom prst="rect">
+            <a:avLst/>
+          </a:prstGeom>
+        </p:spPr>
+        <p:txBody>
+          <a:bodyPr>
+            <a:normAutofit fontScale="90000" lnSpcReduction="10000"/>
+          </a:bodyPr>
+          <a:lstStyle>
+            <a:lvl1pPr algn="l" defTabSz="914400" rtl="0" eaLnBrk="1" latinLnBrk="0" hangingPunct="1">
+              <a:lnSpc>
+                <a:spcPct val="90000"/>
+              </a:lnSpc>
+              <a:spcBef>
+                <a:spcPct val="0"/>
+              </a:spcBef>
+              <a:buNone/>
+              <a:defRPr sz="4400" kern="1200">
+                <a:solidFill>
+                  <a:schemeClr val="tx1"/>
+                </a:solidFill>
+                <a:latin typeface="+mj-lt"/>
+                <a:ea typeface="+mj-ea"/>
+                <a:cs typeface="+mj-cs"/>
+              </a:defRPr>
+            </a:lvl1pPr>
+          </a:lstStyle>
+          <a:p>
+            <a:pPr algn="ctr">
+              <a:lnSpc>
+                <a:spcPct val="150000"/>
+              </a:lnSpc>
+            </a:pPr>
+            <a:r>
+              <a:rPr lang="ru-RU" sz="3200" b="1" dirty="0">
+                <a:latin typeface="Times New Roman" panose="02020603050405020304" pitchFamily="18" charset="0"/>
+                <a:cs typeface="Times New Roman" panose="02020603050405020304" pitchFamily="18" charset="0"/>
+              </a:rPr>
+              <a:t>Технологический стек разработки ИС</a:t>
+            </a:r>
+          </a:p>
+        </p:txBody>
+      </p:sp>
+      <p:sp>
+        <p:nvSpPr>
+          <p:cNvPr id="3" name="TextBox 2">
+            <a:extLst>
+              <a:ext uri="{FF2B5EF4-FFF2-40B4-BE49-F238E27FC236}">
+                <a16:creationId xmlns:a16="http://schemas.microsoft.com/office/drawing/2014/main" id="{969D281E-63BB-2989-D959-68CB7719B3D1}"/>
+              </a:ext>
+            </a:extLst>
+          </p:cNvPr>
+          <p:cNvSpPr txBox="1"/>
+          <p:nvPr/>
+        </p:nvSpPr>
+        <p:spPr>
+          <a:xfrm>
+            <a:off x="1236240" y="2031021"/>
+            <a:ext cx="11028556" cy="2795958"/>
+          </a:xfrm>
+          <a:prstGeom prst="rect">
+            <a:avLst/>
+          </a:prstGeom>
+          <a:noFill/>
+        </p:spPr>
+        <p:txBody>
+          <a:bodyPr wrap="square" rtlCol="0">
+            <a:spAutoFit/>
+          </a:bodyPr>
+          <a:lstStyle/>
+          <a:p>
+            <a:pPr marL="342900" indent="-342900" algn="just">
+              <a:lnSpc>
+                <a:spcPct val="150000"/>
+              </a:lnSpc>
+              <a:buFont typeface="Wingdings" panose="05000000000000000000" pitchFamily="2" charset="2"/>
+              <a:buChar char="v"/>
+            </a:pPr>
+            <a:r>
+              <a:rPr lang="ru-RU" sz="2400" dirty="0">
+                <a:latin typeface="Times New Roman" panose="02020603050405020304" pitchFamily="18" charset="0"/>
+                <a:cs typeface="Times New Roman" panose="02020603050405020304" pitchFamily="18" charset="0"/>
+              </a:rPr>
+              <a:t>Язык программирования: </a:t>
+            </a:r>
+            <a:r>
+              <a:rPr lang="en-US" sz="2400" dirty="0">
+                <a:latin typeface="Times New Roman" panose="02020603050405020304" pitchFamily="18" charset="0"/>
+                <a:cs typeface="Times New Roman" panose="02020603050405020304" pitchFamily="18" charset="0"/>
+              </a:rPr>
+              <a:t>C#</a:t>
+            </a:r>
+          </a:p>
+          <a:p>
+            <a:pPr marL="342900" indent="-342900" algn="just">
+              <a:lnSpc>
+                <a:spcPct val="150000"/>
+              </a:lnSpc>
+              <a:buFont typeface="Wingdings" panose="05000000000000000000" pitchFamily="2" charset="2"/>
+              <a:buChar char="v"/>
+            </a:pPr>
+            <a:r>
+              <a:rPr lang="ru-RU" sz="2400" dirty="0">
+                <a:latin typeface="Times New Roman" panose="02020603050405020304" pitchFamily="18" charset="0"/>
+                <a:cs typeface="Times New Roman" panose="02020603050405020304" pitchFamily="18" charset="0"/>
+              </a:rPr>
+              <a:t>Платформа: .</a:t>
+            </a:r>
+            <a:r>
+              <a:rPr lang="en-US" sz="2400" dirty="0">
+                <a:latin typeface="Times New Roman" panose="02020603050405020304" pitchFamily="18" charset="0"/>
+                <a:cs typeface="Times New Roman" panose="02020603050405020304" pitchFamily="18" charset="0"/>
+              </a:rPr>
+              <a:t>NET 6 / .NET Framework (Windows Forms)</a:t>
+            </a:r>
+          </a:p>
+          <a:p>
+            <a:pPr marL="342900" indent="-342900" algn="just">
+              <a:lnSpc>
+                <a:spcPct val="150000"/>
+              </a:lnSpc>
+              <a:buFont typeface="Wingdings" panose="05000000000000000000" pitchFamily="2" charset="2"/>
+              <a:buChar char="v"/>
+            </a:pPr>
+            <a:r>
+              <a:rPr lang="ru-RU" sz="2400" dirty="0">
+                <a:latin typeface="Times New Roman" panose="02020603050405020304" pitchFamily="18" charset="0"/>
+                <a:cs typeface="Times New Roman" panose="02020603050405020304" pitchFamily="18" charset="0"/>
+              </a:rPr>
+              <a:t>СУБД: </a:t>
+            </a:r>
+            <a:r>
+              <a:rPr lang="en-US" sz="2400" dirty="0">
+                <a:latin typeface="Times New Roman" panose="02020603050405020304" pitchFamily="18" charset="0"/>
+                <a:cs typeface="Times New Roman" panose="02020603050405020304" pitchFamily="18" charset="0"/>
+              </a:rPr>
+              <a:t>Microsoft SQL Server</a:t>
+            </a:r>
+          </a:p>
+          <a:p>
+            <a:pPr marL="342900" indent="-342900" algn="just">
+              <a:lnSpc>
+                <a:spcPct val="150000"/>
+              </a:lnSpc>
+              <a:buFont typeface="Wingdings" panose="05000000000000000000" pitchFamily="2" charset="2"/>
+              <a:buChar char="v"/>
+            </a:pPr>
+            <a:r>
+              <a:rPr lang="ru-RU" sz="2400" dirty="0">
+                <a:latin typeface="Times New Roman" panose="02020603050405020304" pitchFamily="18" charset="0"/>
+                <a:cs typeface="Times New Roman" panose="02020603050405020304" pitchFamily="18" charset="0"/>
+              </a:rPr>
+              <a:t>Система контроля версий: </a:t>
+            </a:r>
+            <a:r>
+              <a:rPr lang="en-US" sz="2400" dirty="0">
+                <a:latin typeface="Times New Roman" panose="02020603050405020304" pitchFamily="18" charset="0"/>
+                <a:cs typeface="Times New Roman" panose="02020603050405020304" pitchFamily="18" charset="0"/>
+              </a:rPr>
+              <a:t>Git (</a:t>
+            </a:r>
+            <a:r>
+              <a:rPr lang="ru-RU" sz="2400" dirty="0">
+                <a:latin typeface="Times New Roman" panose="02020603050405020304" pitchFamily="18" charset="0"/>
+                <a:cs typeface="Times New Roman" panose="02020603050405020304" pitchFamily="18" charset="0"/>
+              </a:rPr>
+              <a:t>с использованием </a:t>
+            </a:r>
+            <a:r>
+              <a:rPr lang="en-US" sz="2400" dirty="0">
+                <a:latin typeface="Times New Roman" panose="02020603050405020304" pitchFamily="18" charset="0"/>
+                <a:cs typeface="Times New Roman" panose="02020603050405020304" pitchFamily="18" charset="0"/>
+              </a:rPr>
+              <a:t>GitHub/GitLab)</a:t>
+            </a:r>
+          </a:p>
+          <a:p>
+            <a:pPr marL="342900" indent="-342900" algn="just">
+              <a:lnSpc>
+                <a:spcPct val="150000"/>
+              </a:lnSpc>
+              <a:buFont typeface="Wingdings" panose="05000000000000000000" pitchFamily="2" charset="2"/>
+              <a:buChar char="v"/>
+            </a:pPr>
+            <a:r>
+              <a:rPr lang="ru-RU" sz="2400" dirty="0">
+                <a:latin typeface="Times New Roman" panose="02020603050405020304" pitchFamily="18" charset="0"/>
+                <a:cs typeface="Times New Roman" panose="02020603050405020304" pitchFamily="18" charset="0"/>
+              </a:rPr>
+              <a:t>Инструменты: </a:t>
+            </a:r>
+            <a:r>
+              <a:rPr lang="en-US" sz="2400" dirty="0">
+                <a:latin typeface="Times New Roman" panose="02020603050405020304" pitchFamily="18" charset="0"/>
+                <a:cs typeface="Times New Roman" panose="02020603050405020304" pitchFamily="18" charset="0"/>
+              </a:rPr>
+              <a:t>Visual Studio, SSMS, </a:t>
+            </a:r>
+            <a:r>
+              <a:rPr lang="en-US" sz="2400" dirty="0" err="1">
+                <a:latin typeface="Times New Roman" panose="02020603050405020304" pitchFamily="18" charset="0"/>
+                <a:cs typeface="Times New Roman" panose="02020603050405020304" pitchFamily="18" charset="0"/>
+              </a:rPr>
+              <a:t>ERwin</a:t>
+            </a:r>
+            <a:r>
+              <a:rPr lang="en-US" sz="2400" dirty="0">
+                <a:latin typeface="Times New Roman" panose="02020603050405020304" pitchFamily="18" charset="0"/>
+                <a:cs typeface="Times New Roman" panose="02020603050405020304" pitchFamily="18" charset="0"/>
+              </a:rPr>
+              <a:t> / draw.io </a:t>
+            </a:r>
+            <a:r>
+              <a:rPr lang="ru-RU" sz="2400" dirty="0">
+                <a:latin typeface="Times New Roman" panose="02020603050405020304" pitchFamily="18" charset="0"/>
+                <a:cs typeface="Times New Roman" panose="02020603050405020304" pitchFamily="18" charset="0"/>
+              </a:rPr>
+              <a:t>для моделирования</a:t>
+            </a:r>
+          </a:p>
+        </p:txBody>
+      </p:sp>
+    </p:spTree>
+    <p:extLst>
+      <p:ext uri="{BB962C8B-B14F-4D97-AF65-F5344CB8AC3E}">
+        <p14:creationId xmlns:p14="http://schemas.microsoft.com/office/powerpoint/2010/main" val="159195017"/>
+      </p:ext>
+    </p:extLst>
+  </p:cSld>
+  <p:clrMapOvr>
+    <a:masterClrMapping/>
+  </p:clrMapOvr>
+</p:sld>
+</file>
+
+<file path=ppt/slides/slide18.xml><?xml version="1.0" encoding="utf-8"?>
+<p:sld xmlns:a="http://schemas.openxmlformats.org/drawingml/2006/main" xmlns:r="http://schemas.openxmlformats.org/officeDocument/2006/relationships" xmlns:p="http://schemas.openxmlformats.org/presentationml/2006/main">
+  <p:cSld>
+    <p:spTree>
+      <p:nvGrpSpPr>
         <p:cNvPr id="1" name=""/>
         <p:cNvGrpSpPr/>
         <p:nvPr/>
@@ -6139,7 +6417,7 @@
 </p:sld>
 </file>
 
-<file path=ppt/slides/slide18.xml><?xml version="1.0" encoding="utf-8"?>
+<file path=ppt/slides/slide19.xml><?xml version="1.0" encoding="utf-8"?>
 <p:sld xmlns:a="http://schemas.openxmlformats.org/drawingml/2006/main" xmlns:r="http://schemas.openxmlformats.org/officeDocument/2006/relationships" xmlns:p="http://schemas.openxmlformats.org/presentationml/2006/main">
   <p:cSld>
     <p:spTree>
